--- a/NOIP 2-1-2 动态规划II（01背包）.pptx
+++ b/NOIP 2-1-2 动态规划II（01背包）.pptx
@@ -3505,7 +3505,7 @@
           <a:blip r:embed="rId9">
             <a:extLst>
               <a:ext uri="{96DAC541-7B7A-43D3-8B79-37D633B846F1}">
-                <asvg:svgBlip xmlns:asvg="http://schemas.microsoft.com/office/drawing/2016/SVG/main" xmlns="" r:embed="rId10"/>
+                <asvg:svgBlip xmlns="" xmlns:asvg="http://schemas.microsoft.com/office/drawing/2016/SVG/main" r:embed="rId10"/>
               </a:ext>
             </a:extLst>
           </a:blip>
@@ -3597,7 +3597,7 @@
           <a:blip r:embed="rId11">
             <a:extLst>
               <a:ext uri="{96DAC541-7B7A-43D3-8B79-37D633B846F1}">
-                <asvg:svgBlip xmlns:asvg="http://schemas.microsoft.com/office/drawing/2016/SVG/main" xmlns="" r:embed="rId12"/>
+                <asvg:svgBlip xmlns="" xmlns:asvg="http://schemas.microsoft.com/office/drawing/2016/SVG/main" r:embed="rId12"/>
               </a:ext>
             </a:extLst>
           </a:blip>
@@ -3631,7 +3631,7 @@
           <a:blip r:embed="rId13">
             <a:extLst>
               <a:ext uri="{96DAC541-7B7A-43D3-8B79-37D633B846F1}">
-                <asvg:svgBlip xmlns:asvg="http://schemas.microsoft.com/office/drawing/2016/SVG/main" xmlns="" r:embed="rId14"/>
+                <asvg:svgBlip xmlns="" xmlns:asvg="http://schemas.microsoft.com/office/drawing/2016/SVG/main" r:embed="rId14"/>
               </a:ext>
             </a:extLst>
           </a:blip>
@@ -3689,7 +3689,7 @@
               <a:blip r:embed="rId15">
                 <a:extLst>
                   <a:ext uri="{96DAC541-7B7A-43D3-8B79-37D633B846F1}">
-                    <asvg:svgBlip xmlns:asvg="http://schemas.microsoft.com/office/drawing/2016/SVG/main" xmlns="" r:embed="rId16"/>
+                    <asvg:svgBlip xmlns="" xmlns:asvg="http://schemas.microsoft.com/office/drawing/2016/SVG/main" r:embed="rId16"/>
                   </a:ext>
                 </a:extLst>
               </a:blip>
@@ -3753,7 +3753,7 @@
             <a:blip r:embed="rId13">
               <a:extLst>
                 <a:ext uri="{96DAC541-7B7A-43D3-8B79-37D633B846F1}">
-                  <asvg:svgBlip xmlns:asvg="http://schemas.microsoft.com/office/drawing/2016/SVG/main" xmlns="" r:embed="rId14"/>
+                  <asvg:svgBlip xmlns="" xmlns:asvg="http://schemas.microsoft.com/office/drawing/2016/SVG/main" r:embed="rId14"/>
                 </a:ext>
               </a:extLst>
             </a:blip>
@@ -3817,7 +3817,7 @@
           <a:blip r:embed="rId13">
             <a:extLst>
               <a:ext uri="{96DAC541-7B7A-43D3-8B79-37D633B846F1}">
-                <asvg:svgBlip xmlns:asvg="http://schemas.microsoft.com/office/drawing/2016/SVG/main" xmlns="" r:embed="rId14"/>
+                <asvg:svgBlip xmlns="" xmlns:asvg="http://schemas.microsoft.com/office/drawing/2016/SVG/main" r:embed="rId14"/>
               </a:ext>
             </a:extLst>
           </a:blip>
@@ -3861,7 +3861,6 @@
               <a:rPr lang="en-US" altLang="zh-CN" dirty="0"/>
               <a:t>5</a:t>
             </a:r>
-            <a:endParaRPr lang="en-US" altLang="zh-CN" dirty="0"/>
           </a:p>
         </p:txBody>
       </p:sp>
@@ -5124,18 +5123,6 @@
               </a:rPr>
               <a:t>5</a:t>
             </a:r>
-            <a:endParaRPr lang="en-US" altLang="zh-CN" sz="1000" dirty="0">
-              <a:solidFill>
-                <a:schemeClr val="tx1">
-                  <a:lumMod val="85000"/>
-                  <a:lumOff val="15000"/>
-                </a:schemeClr>
-              </a:solidFill>
-              <a:latin typeface="微软雅黑" panose="020B0503020204020204" charset="-122"/>
-              <a:ea typeface="微软雅黑" panose="020B0503020204020204" charset="-122"/>
-              <a:cs typeface="微软雅黑" panose="020B0503020204020204" charset="-122"/>
-              <a:sym typeface="+mn-ea"/>
-            </a:endParaRPr>
           </a:p>
           <a:p>
             <a:pPr marL="228600" indent="-228600" algn="l" fontAlgn="auto">
@@ -9134,7 +9121,7 @@
           <a:blip r:embed="rId35">
             <a:extLst>
               <a:ext uri="{96DAC541-7B7A-43D3-8B79-37D633B846F1}">
-                <asvg:svgBlip xmlns:asvg="http://schemas.microsoft.com/office/drawing/2016/SVG/main" xmlns="" r:embed="rId36"/>
+                <asvg:svgBlip xmlns="" xmlns:asvg="http://schemas.microsoft.com/office/drawing/2016/SVG/main" r:embed="rId36"/>
               </a:ext>
             </a:extLst>
           </a:blip>
@@ -9168,7 +9155,7 @@
           <a:blip r:embed="rId35">
             <a:extLst>
               <a:ext uri="{96DAC541-7B7A-43D3-8B79-37D633B846F1}">
-                <asvg:svgBlip xmlns:asvg="http://schemas.microsoft.com/office/drawing/2016/SVG/main" xmlns="" r:embed="rId36"/>
+                <asvg:svgBlip xmlns="" xmlns:asvg="http://schemas.microsoft.com/office/drawing/2016/SVG/main" r:embed="rId36"/>
               </a:ext>
             </a:extLst>
           </a:blip>
@@ -9202,7 +9189,7 @@
           <a:blip r:embed="rId35">
             <a:extLst>
               <a:ext uri="{96DAC541-7B7A-43D3-8B79-37D633B846F1}">
-                <asvg:svgBlip xmlns:asvg="http://schemas.microsoft.com/office/drawing/2016/SVG/main" xmlns="" r:embed="rId36"/>
+                <asvg:svgBlip xmlns="" xmlns:asvg="http://schemas.microsoft.com/office/drawing/2016/SVG/main" r:embed="rId36"/>
               </a:ext>
             </a:extLst>
           </a:blip>
@@ -9236,7 +9223,7 @@
           <a:blip r:embed="rId35">
             <a:extLst>
               <a:ext uri="{96DAC541-7B7A-43D3-8B79-37D633B846F1}">
-                <asvg:svgBlip xmlns:asvg="http://schemas.microsoft.com/office/drawing/2016/SVG/main" xmlns="" r:embed="rId36"/>
+                <asvg:svgBlip xmlns="" xmlns:asvg="http://schemas.microsoft.com/office/drawing/2016/SVG/main" r:embed="rId36"/>
               </a:ext>
             </a:extLst>
           </a:blip>
@@ -9270,7 +9257,7 @@
           <a:blip r:embed="rId35">
             <a:extLst>
               <a:ext uri="{96DAC541-7B7A-43D3-8B79-37D633B846F1}">
-                <asvg:svgBlip xmlns:asvg="http://schemas.microsoft.com/office/drawing/2016/SVG/main" xmlns="" r:embed="rId36"/>
+                <asvg:svgBlip xmlns="" xmlns:asvg="http://schemas.microsoft.com/office/drawing/2016/SVG/main" r:embed="rId36"/>
               </a:ext>
             </a:extLst>
           </a:blip>
@@ -9304,7 +9291,7 @@
           <a:blip r:embed="rId35">
             <a:extLst>
               <a:ext uri="{96DAC541-7B7A-43D3-8B79-37D633B846F1}">
-                <asvg:svgBlip xmlns:asvg="http://schemas.microsoft.com/office/drawing/2016/SVG/main" xmlns="" r:embed="rId36"/>
+                <asvg:svgBlip xmlns="" xmlns:asvg="http://schemas.microsoft.com/office/drawing/2016/SVG/main" r:embed="rId36"/>
               </a:ext>
             </a:extLst>
           </a:blip>
@@ -9338,7 +9325,7 @@
           <a:blip r:embed="rId35">
             <a:extLst>
               <a:ext uri="{96DAC541-7B7A-43D3-8B79-37D633B846F1}">
-                <asvg:svgBlip xmlns:asvg="http://schemas.microsoft.com/office/drawing/2016/SVG/main" xmlns="" r:embed="rId36"/>
+                <asvg:svgBlip xmlns="" xmlns:asvg="http://schemas.microsoft.com/office/drawing/2016/SVG/main" r:embed="rId36"/>
               </a:ext>
             </a:extLst>
           </a:blip>
@@ -9372,7 +9359,7 @@
           <a:blip r:embed="rId35">
             <a:extLst>
               <a:ext uri="{96DAC541-7B7A-43D3-8B79-37D633B846F1}">
-                <asvg:svgBlip xmlns:asvg="http://schemas.microsoft.com/office/drawing/2016/SVG/main" xmlns="" r:embed="rId36"/>
+                <asvg:svgBlip xmlns="" xmlns:asvg="http://schemas.microsoft.com/office/drawing/2016/SVG/main" r:embed="rId36"/>
               </a:ext>
             </a:extLst>
           </a:blip>
@@ -9406,7 +9393,7 @@
           <a:blip r:embed="rId35">
             <a:extLst>
               <a:ext uri="{96DAC541-7B7A-43D3-8B79-37D633B846F1}">
-                <asvg:svgBlip xmlns:asvg="http://schemas.microsoft.com/office/drawing/2016/SVG/main" xmlns="" r:embed="rId36"/>
+                <asvg:svgBlip xmlns="" xmlns:asvg="http://schemas.microsoft.com/office/drawing/2016/SVG/main" r:embed="rId36"/>
               </a:ext>
             </a:extLst>
           </a:blip>
@@ -9440,7 +9427,7 @@
           <a:blip r:embed="rId35">
             <a:extLst>
               <a:ext uri="{96DAC541-7B7A-43D3-8B79-37D633B846F1}">
-                <asvg:svgBlip xmlns:asvg="http://schemas.microsoft.com/office/drawing/2016/SVG/main" xmlns="" r:embed="rId36"/>
+                <asvg:svgBlip xmlns="" xmlns:asvg="http://schemas.microsoft.com/office/drawing/2016/SVG/main" r:embed="rId36"/>
               </a:ext>
             </a:extLst>
           </a:blip>
@@ -10391,7 +10378,6 @@
               <a:rPr lang="en-US" altLang="zh-CN" dirty="0"/>
               <a:t>5</a:t>
             </a:r>
-            <a:endParaRPr lang="en-US" altLang="zh-CN" dirty="0"/>
           </a:p>
         </p:txBody>
       </p:sp>
@@ -10659,11 +10645,6 @@
               </a:rPr>
               <a:t>5</a:t>
             </a:r>
-            <a:endParaRPr lang="en-US" altLang="zh-CN" dirty="0">
-              <a:solidFill>
-                <a:schemeClr val="accent2"/>
-              </a:solidFill>
-            </a:endParaRPr>
           </a:p>
         </p:txBody>
       </p:sp>
@@ -11167,7 +11148,6 @@
               <a:rPr lang="en-US" altLang="zh-CN" dirty="0"/>
               <a:t>5</a:t>
             </a:r>
-            <a:endParaRPr lang="en-US" altLang="zh-CN" dirty="0"/>
           </a:p>
         </p:txBody>
       </p:sp>
@@ -17939,6 +17919,11 @@
             <p:custDataLst>
               <p:tags r:id="rId1"/>
             </p:custDataLst>
+            <p:extLst>
+              <p:ext uri="{D42A27DB-BD31-4B8C-83A1-F6EECF244321}">
+                <p14:modId xmlns:p14="http://schemas.microsoft.com/office/powerpoint/2010/main" val="303619807"/>
+              </p:ext>
+            </p:extLst>
           </p:nvPr>
         </p:nvGraphicFramePr>
         <p:xfrm>
@@ -19948,16 +19933,16 @@
                         <a:buNone/>
                       </a:pPr>
                       <a:r>
-                        <a:rPr lang="zh-CN" altLang="en-US"/>
+                        <a:rPr lang="zh-CN" altLang="en-US" dirty="0"/>
                         <a:t>②</a:t>
                       </a:r>
                       <a:r>
-                        <a:rPr lang="en-US" altLang="zh-CN" sz="900">
+                        <a:rPr lang="en-US" altLang="zh-CN" sz="900" dirty="0" smtClean="0">
                           <a:sym typeface="+mn-ea"/>
                         </a:rPr>
-                        <a:t>6,6</a:t>
+                        <a:t>6,5</a:t>
                       </a:r>
-                      <a:endParaRPr lang="zh-CN" altLang="en-US"/>
+                      <a:endParaRPr lang="zh-CN" altLang="en-US" dirty="0"/>
                     </a:p>
                   </a:txBody>
                   <a:tcPr anchor="ctr">
@@ -20848,7 +20833,7 @@
                       <a:pPr algn="ctr">
                         <a:buNone/>
                       </a:pPr>
-                      <a:endParaRPr lang="zh-CN" altLang="en-US"/>
+                      <a:endParaRPr lang="zh-CN" altLang="en-US" dirty="0"/>
                     </a:p>
                   </a:txBody>
                   <a:tcPr anchor="ctr">
@@ -20904,7 +20889,7 @@
           <a:blip r:embed="rId43">
             <a:extLst>
               <a:ext uri="{96DAC541-7B7A-43D3-8B79-37D633B846F1}">
-                <asvg:svgBlip xmlns:asvg="http://schemas.microsoft.com/office/drawing/2016/SVG/main" xmlns="" r:embed="rId44"/>
+                <asvg:svgBlip xmlns="" xmlns:asvg="http://schemas.microsoft.com/office/drawing/2016/SVG/main" r:embed="rId44"/>
               </a:ext>
             </a:extLst>
           </a:blip>
@@ -20938,7 +20923,7 @@
           <a:blip r:embed="rId43">
             <a:extLst>
               <a:ext uri="{96DAC541-7B7A-43D3-8B79-37D633B846F1}">
-                <asvg:svgBlip xmlns:asvg="http://schemas.microsoft.com/office/drawing/2016/SVG/main" xmlns="" r:embed="rId44"/>
+                <asvg:svgBlip xmlns="" xmlns:asvg="http://schemas.microsoft.com/office/drawing/2016/SVG/main" r:embed="rId44"/>
               </a:ext>
             </a:extLst>
           </a:blip>
@@ -20972,7 +20957,7 @@
           <a:blip r:embed="rId43">
             <a:extLst>
               <a:ext uri="{96DAC541-7B7A-43D3-8B79-37D633B846F1}">
-                <asvg:svgBlip xmlns:asvg="http://schemas.microsoft.com/office/drawing/2016/SVG/main" xmlns="" r:embed="rId44"/>
+                <asvg:svgBlip xmlns="" xmlns:asvg="http://schemas.microsoft.com/office/drawing/2016/SVG/main" r:embed="rId44"/>
               </a:ext>
             </a:extLst>
           </a:blip>
@@ -21006,7 +20991,7 @@
           <a:blip r:embed="rId43">
             <a:extLst>
               <a:ext uri="{96DAC541-7B7A-43D3-8B79-37D633B846F1}">
-                <asvg:svgBlip xmlns:asvg="http://schemas.microsoft.com/office/drawing/2016/SVG/main" xmlns="" r:embed="rId44"/>
+                <asvg:svgBlip xmlns="" xmlns:asvg="http://schemas.microsoft.com/office/drawing/2016/SVG/main" r:embed="rId44"/>
               </a:ext>
             </a:extLst>
           </a:blip>
@@ -21040,7 +21025,7 @@
           <a:blip r:embed="rId43">
             <a:extLst>
               <a:ext uri="{96DAC541-7B7A-43D3-8B79-37D633B846F1}">
-                <asvg:svgBlip xmlns:asvg="http://schemas.microsoft.com/office/drawing/2016/SVG/main" xmlns="" r:embed="rId44"/>
+                <asvg:svgBlip xmlns="" xmlns:asvg="http://schemas.microsoft.com/office/drawing/2016/SVG/main" r:embed="rId44"/>
               </a:ext>
             </a:extLst>
           </a:blip>
@@ -21074,7 +21059,7 @@
           <a:blip r:embed="rId43">
             <a:extLst>
               <a:ext uri="{96DAC541-7B7A-43D3-8B79-37D633B846F1}">
-                <asvg:svgBlip xmlns:asvg="http://schemas.microsoft.com/office/drawing/2016/SVG/main" xmlns="" r:embed="rId44"/>
+                <asvg:svgBlip xmlns="" xmlns:asvg="http://schemas.microsoft.com/office/drawing/2016/SVG/main" r:embed="rId44"/>
               </a:ext>
             </a:extLst>
           </a:blip>
@@ -21108,7 +21093,7 @@
           <a:blip r:embed="rId43">
             <a:extLst>
               <a:ext uri="{96DAC541-7B7A-43D3-8B79-37D633B846F1}">
-                <asvg:svgBlip xmlns:asvg="http://schemas.microsoft.com/office/drawing/2016/SVG/main" xmlns="" r:embed="rId44"/>
+                <asvg:svgBlip xmlns="" xmlns:asvg="http://schemas.microsoft.com/office/drawing/2016/SVG/main" r:embed="rId44"/>
               </a:ext>
             </a:extLst>
           </a:blip>
@@ -21142,7 +21127,7 @@
           <a:blip r:embed="rId43">
             <a:extLst>
               <a:ext uri="{96DAC541-7B7A-43D3-8B79-37D633B846F1}">
-                <asvg:svgBlip xmlns:asvg="http://schemas.microsoft.com/office/drawing/2016/SVG/main" xmlns="" r:embed="rId44"/>
+                <asvg:svgBlip xmlns="" xmlns:asvg="http://schemas.microsoft.com/office/drawing/2016/SVG/main" r:embed="rId44"/>
               </a:ext>
             </a:extLst>
           </a:blip>
@@ -21176,7 +21161,7 @@
           <a:blip r:embed="rId43">
             <a:extLst>
               <a:ext uri="{96DAC541-7B7A-43D3-8B79-37D633B846F1}">
-                <asvg:svgBlip xmlns:asvg="http://schemas.microsoft.com/office/drawing/2016/SVG/main" xmlns="" r:embed="rId44"/>
+                <asvg:svgBlip xmlns="" xmlns:asvg="http://schemas.microsoft.com/office/drawing/2016/SVG/main" r:embed="rId44"/>
               </a:ext>
             </a:extLst>
           </a:blip>
@@ -21210,7 +21195,7 @@
           <a:blip r:embed="rId43">
             <a:extLst>
               <a:ext uri="{96DAC541-7B7A-43D3-8B79-37D633B846F1}">
-                <asvg:svgBlip xmlns:asvg="http://schemas.microsoft.com/office/drawing/2016/SVG/main" xmlns="" r:embed="rId44"/>
+                <asvg:svgBlip xmlns="" xmlns:asvg="http://schemas.microsoft.com/office/drawing/2016/SVG/main" r:embed="rId44"/>
               </a:ext>
             </a:extLst>
           </a:blip>
@@ -22154,9 +22139,10 @@
           <a:p>
             <a:pPr algn="ctr"/>
             <a:r>
-              <a:rPr lang="en-US" altLang="zh-CN"/>
-              <a:t>6</a:t>
-            </a:r>
+              <a:rPr lang="en-US" altLang="zh-CN" dirty="0"/>
+              <a:t>5</a:t>
+            </a:r>
+            <a:endParaRPr lang="en-US" altLang="zh-CN" dirty="0"/>
           </a:p>
         </p:txBody>
       </p:sp>
@@ -22510,9 +22496,10 @@
           <a:p>
             <a:pPr algn="ctr"/>
             <a:r>
-              <a:rPr lang="en-US" altLang="zh-CN"/>
-              <a:t>6</a:t>
-            </a:r>
+              <a:rPr lang="en-US" altLang="zh-CN" dirty="0"/>
+              <a:t>5</a:t>
+            </a:r>
+            <a:endParaRPr lang="en-US" altLang="zh-CN" dirty="0"/>
           </a:p>
         </p:txBody>
       </p:sp>
@@ -22876,9 +22863,10 @@
           <a:p>
             <a:pPr algn="ctr"/>
             <a:r>
-              <a:rPr lang="en-US" altLang="zh-CN"/>
-              <a:t>12</a:t>
-            </a:r>
+              <a:rPr lang="en-US" altLang="zh-CN" dirty="0" smtClean="0"/>
+              <a:t>11</a:t>
+            </a:r>
+            <a:endParaRPr lang="en-US" altLang="zh-CN" dirty="0"/>
           </a:p>
         </p:txBody>
       </p:sp>
@@ -28198,6 +28186,11 @@
             <p:custDataLst>
               <p:tags r:id="rId2"/>
             </p:custDataLst>
+            <p:extLst>
+              <p:ext uri="{D42A27DB-BD31-4B8C-83A1-F6EECF244321}">
+                <p14:modId xmlns:p14="http://schemas.microsoft.com/office/powerpoint/2010/main" val="1549331744"/>
+              </p:ext>
+            </p:extLst>
           </p:nvPr>
         </p:nvGraphicFramePr>
         <p:xfrm>
@@ -28635,9 +28628,10 @@
                         <a:buNone/>
                       </a:pPr>
                       <a:r>
-                        <a:rPr lang="en-US" altLang="zh-CN" sz="2000"/>
-                        <a:t>6</a:t>
+                        <a:rPr lang="en-US" altLang="zh-CN" sz="2000" dirty="0"/>
+                        <a:t>5</a:t>
                       </a:r>
+                      <a:endParaRPr lang="en-US" altLang="zh-CN" sz="2000" dirty="0"/>
                     </a:p>
                   </a:txBody>
                   <a:tcPr anchor="ctr">
@@ -28682,9 +28676,10 @@
                         <a:buNone/>
                       </a:pPr>
                       <a:r>
-                        <a:rPr lang="en-US" altLang="zh-CN" sz="2000"/>
-                        <a:t>6</a:t>
+                        <a:rPr lang="en-US" altLang="zh-CN" sz="2000" dirty="0"/>
+                        <a:t>5</a:t>
                       </a:r>
+                      <a:endParaRPr lang="en-US" altLang="zh-CN" sz="2000" dirty="0"/>
                     </a:p>
                   </a:txBody>
                   <a:tcPr anchor="ctr">
@@ -28823,7 +28818,7 @@
                         <a:buNone/>
                       </a:pPr>
                       <a:r>
-                        <a:rPr lang="en-US" altLang="zh-CN" sz="2000"/>
+                        <a:rPr lang="en-US" altLang="zh-CN" sz="2000" dirty="0"/>
                         <a:t>10</a:t>
                       </a:r>
                     </a:p>
@@ -29137,9 +29132,10 @@
           <a:p>
             <a:pPr algn="ctr"/>
             <a:r>
-              <a:rPr lang="en-US" altLang="zh-CN"/>
-              <a:t>6</a:t>
-            </a:r>
+              <a:rPr lang="en-US" altLang="zh-CN" dirty="0"/>
+              <a:t>5</a:t>
+            </a:r>
+            <a:endParaRPr lang="en-US" altLang="zh-CN" dirty="0"/>
           </a:p>
         </p:txBody>
       </p:sp>
@@ -29465,9 +29461,10 @@
           <a:p>
             <a:pPr algn="ctr"/>
             <a:r>
-              <a:rPr lang="en-US" altLang="zh-CN"/>
-              <a:t>6</a:t>
-            </a:r>
+              <a:rPr lang="en-US" altLang="zh-CN" dirty="0"/>
+              <a:t>5</a:t>
+            </a:r>
+            <a:endParaRPr lang="en-US" altLang="zh-CN" dirty="0"/>
           </a:p>
         </p:txBody>
       </p:sp>
@@ -29669,9 +29666,10 @@
           <a:p>
             <a:pPr algn="ctr"/>
             <a:r>
-              <a:rPr lang="en-US" altLang="zh-CN"/>
-              <a:t>12</a:t>
-            </a:r>
+              <a:rPr lang="en-US" altLang="zh-CN" dirty="0" smtClean="0"/>
+              <a:t>11</a:t>
+            </a:r>
+            <a:endParaRPr lang="en-US" altLang="zh-CN" dirty="0"/>
           </a:p>
         </p:txBody>
       </p:sp>
@@ -29834,13 +29832,18 @@
           <a:p>
             <a:pPr algn="ctr"/>
             <a:r>
-              <a:rPr lang="en-US" altLang="zh-CN" sz="2000">
+              <a:rPr lang="en-US" altLang="zh-CN" sz="2000" dirty="0" smtClean="0">
                 <a:solidFill>
                   <a:srgbClr val="FF0000"/>
                 </a:solidFill>
               </a:rPr>
-              <a:t>12</a:t>
-            </a:r>
+              <a:t>11</a:t>
+            </a:r>
+            <a:endParaRPr lang="en-US" altLang="zh-CN" sz="2000" dirty="0">
+              <a:solidFill>
+                <a:srgbClr val="FF0000"/>
+              </a:solidFill>
+            </a:endParaRPr>
           </a:p>
         </p:txBody>
       </p:sp>
@@ -41195,18 +41198,6 @@
               </a:rPr>
               <a:t>5</a:t>
             </a:r>
-            <a:endParaRPr lang="en-US" altLang="zh-CN" sz="1600" dirty="0">
-              <a:solidFill>
-                <a:schemeClr val="tx1">
-                  <a:lumMod val="85000"/>
-                  <a:lumOff val="15000"/>
-                </a:schemeClr>
-              </a:solidFill>
-              <a:latin typeface="微软雅黑" panose="020B0503020204020204" charset="-122"/>
-              <a:ea typeface="微软雅黑" panose="020B0503020204020204" charset="-122"/>
-              <a:cs typeface="微软雅黑" panose="020B0503020204020204" charset="-122"/>
-              <a:sym typeface="+mn-ea"/>
-            </a:endParaRPr>
           </a:p>
           <a:p>
             <a:pPr marL="228600" indent="-228600" algn="l" fontAlgn="auto">
@@ -41431,7 +41422,7 @@
           <a:blip r:embed="rId6">
             <a:extLst>
               <a:ext uri="{96DAC541-7B7A-43D3-8B79-37D633B846F1}">
-                <asvg:svgBlip xmlns:asvg="http://schemas.microsoft.com/office/drawing/2016/SVG/main" xmlns="" r:embed="rId7"/>
+                <asvg:svgBlip xmlns="" xmlns:asvg="http://schemas.microsoft.com/office/drawing/2016/SVG/main" r:embed="rId7"/>
               </a:ext>
             </a:extLst>
           </a:blip>
@@ -41523,7 +41514,7 @@
           <a:blip r:embed="rId8">
             <a:extLst>
               <a:ext uri="{96DAC541-7B7A-43D3-8B79-37D633B846F1}">
-                <asvg:svgBlip xmlns:asvg="http://schemas.microsoft.com/office/drawing/2016/SVG/main" xmlns="" r:embed="rId9"/>
+                <asvg:svgBlip xmlns="" xmlns:asvg="http://schemas.microsoft.com/office/drawing/2016/SVG/main" r:embed="rId9"/>
               </a:ext>
             </a:extLst>
           </a:blip>
@@ -41553,7 +41544,7 @@
           <a:blip r:embed="rId10">
             <a:extLst>
               <a:ext uri="{96DAC541-7B7A-43D3-8B79-37D633B846F1}">
-                <asvg:svgBlip xmlns:asvg="http://schemas.microsoft.com/office/drawing/2016/SVG/main" xmlns="" r:embed="rId11"/>
+                <asvg:svgBlip xmlns="" xmlns:asvg="http://schemas.microsoft.com/office/drawing/2016/SVG/main" r:embed="rId11"/>
               </a:ext>
             </a:extLst>
           </a:blip>
@@ -41587,7 +41578,7 @@
           <a:blip r:embed="rId12">
             <a:extLst>
               <a:ext uri="{96DAC541-7B7A-43D3-8B79-37D633B846F1}">
-                <asvg:svgBlip xmlns:asvg="http://schemas.microsoft.com/office/drawing/2016/SVG/main" xmlns="" r:embed="rId13"/>
+                <asvg:svgBlip xmlns="" xmlns:asvg="http://schemas.microsoft.com/office/drawing/2016/SVG/main" r:embed="rId13"/>
               </a:ext>
             </a:extLst>
           </a:blip>
@@ -41889,18 +41880,6 @@
               </a:rPr>
               <a:t>5</a:t>
             </a:r>
-            <a:endParaRPr lang="en-US" altLang="zh-CN" sz="1000" dirty="0">
-              <a:solidFill>
-                <a:schemeClr val="tx1">
-                  <a:lumMod val="85000"/>
-                  <a:lumOff val="15000"/>
-                </a:schemeClr>
-              </a:solidFill>
-              <a:latin typeface="微软雅黑" panose="020B0503020204020204" charset="-122"/>
-              <a:ea typeface="微软雅黑" panose="020B0503020204020204" charset="-122"/>
-              <a:cs typeface="微软雅黑" panose="020B0503020204020204" charset="-122"/>
-              <a:sym typeface="+mn-ea"/>
-            </a:endParaRPr>
           </a:p>
           <a:p>
             <a:pPr marL="228600" indent="-228600" algn="l" fontAlgn="auto">
@@ -42130,7 +42109,7 @@
           <a:blip r:embed="rId8">
             <a:extLst>
               <a:ext uri="{96DAC541-7B7A-43D3-8B79-37D633B846F1}">
-                <asvg:svgBlip xmlns:asvg="http://schemas.microsoft.com/office/drawing/2016/SVG/main" xmlns="" r:embed="rId9"/>
+                <asvg:svgBlip xmlns="" xmlns:asvg="http://schemas.microsoft.com/office/drawing/2016/SVG/main" r:embed="rId9"/>
               </a:ext>
             </a:extLst>
           </a:blip>
@@ -42222,7 +42201,7 @@
           <a:blip r:embed="rId10">
             <a:extLst>
               <a:ext uri="{96DAC541-7B7A-43D3-8B79-37D633B846F1}">
-                <asvg:svgBlip xmlns:asvg="http://schemas.microsoft.com/office/drawing/2016/SVG/main" xmlns="" r:embed="rId11"/>
+                <asvg:svgBlip xmlns="" xmlns:asvg="http://schemas.microsoft.com/office/drawing/2016/SVG/main" r:embed="rId11"/>
               </a:ext>
             </a:extLst>
           </a:blip>
@@ -42256,7 +42235,7 @@
           <a:blip r:embed="rId12">
             <a:extLst>
               <a:ext uri="{96DAC541-7B7A-43D3-8B79-37D633B846F1}">
-                <asvg:svgBlip xmlns:asvg="http://schemas.microsoft.com/office/drawing/2016/SVG/main" xmlns="" r:embed="rId13"/>
+                <asvg:svgBlip xmlns="" xmlns:asvg="http://schemas.microsoft.com/office/drawing/2016/SVG/main" r:embed="rId13"/>
               </a:ext>
             </a:extLst>
           </a:blip>
@@ -42314,7 +42293,7 @@
               <a:blip r:embed="rId14">
                 <a:extLst>
                   <a:ext uri="{96DAC541-7B7A-43D3-8B79-37D633B846F1}">
-                    <asvg:svgBlip xmlns:asvg="http://schemas.microsoft.com/office/drawing/2016/SVG/main" xmlns="" r:embed="rId15"/>
+                    <asvg:svgBlip xmlns="" xmlns:asvg="http://schemas.microsoft.com/office/drawing/2016/SVG/main" r:embed="rId15"/>
                   </a:ext>
                 </a:extLst>
               </a:blip>
@@ -42378,7 +42357,7 @@
             <a:blip r:embed="rId12">
               <a:extLst>
                 <a:ext uri="{96DAC541-7B7A-43D3-8B79-37D633B846F1}">
-                  <asvg:svgBlip xmlns:asvg="http://schemas.microsoft.com/office/drawing/2016/SVG/main" xmlns="" r:embed="rId13"/>
+                  <asvg:svgBlip xmlns="" xmlns:asvg="http://schemas.microsoft.com/office/drawing/2016/SVG/main" r:embed="rId13"/>
                 </a:ext>
               </a:extLst>
             </a:blip>
@@ -42685,18 +42664,6 @@
               </a:rPr>
               <a:t>5</a:t>
             </a:r>
-            <a:endParaRPr lang="en-US" altLang="zh-CN" sz="1000" dirty="0">
-              <a:solidFill>
-                <a:schemeClr val="tx1">
-                  <a:lumMod val="85000"/>
-                  <a:lumOff val="15000"/>
-                </a:schemeClr>
-              </a:solidFill>
-              <a:latin typeface="微软雅黑" panose="020B0503020204020204" charset="-122"/>
-              <a:ea typeface="微软雅黑" panose="020B0503020204020204" charset="-122"/>
-              <a:cs typeface="微软雅黑" panose="020B0503020204020204" charset="-122"/>
-              <a:sym typeface="+mn-ea"/>
-            </a:endParaRPr>
           </a:p>
           <a:p>
             <a:pPr marL="228600" indent="-228600" algn="l" fontAlgn="auto">
